--- a/docs/konferenca/UBT2026_Florent_Latifi_9min.pptx
+++ b/docs/konferenca/UBT2026_Florent_Latifi_9min.pptx
@@ -951,11 +951,11 @@
             </a:r>
             <a:r>
               <a:rPr i="0"/>
-              <a:t> My name is Florent Latifi, and this work comes from my bachelor thesis at UBT, supervised by Altina Salihu.</a:t>
+              <a:t> My name is Florent Latifi. This is my bachelor thesis at UBT, with my supervisor Altina Salihu.</a:t>
             </a:r>
             <a:r>
               <a:rPr i="0"/>
-              <a:t> In the next ten minutes I will show how we can detect code smells in Java automatically, how accurate that detection really is, and how far we can go in fixing them.</a:t>
+              <a:t> In the next minutes I will show three things: how a tool can find design problems in Java code, how accurate it is, and whether it can also fix them.</a:t>
             </a:r>
           </a:p>
         </p:txBody>
@@ -1026,43 +1026,47 @@
           <a:p>
             <a:r>
               <a:rPr i="0"/>
-              <a:t>To be honest about the limits: compiling is not the same as behaving the same.</a:t>
+              <a:t>To be honest about the limits: code that compiles does not always behave the same.</a:t>
             </a:r>
             <a:r>
               <a:rPr i="0"/>
-              <a:t> We did not run the projects' test suites, so behavior preservation is future work.</a:t>
+              <a:t> I could not run the projects' own tests, so checking the behavior is future work.</a:t>
             </a:r>
             <a:r>
               <a:rPr i="0"/>
-              <a:t> We also used one dataset, four smells, and only Java.</a:t>
+              <a:t> Also: one dataset, four smells, and only Java.</a:t>
             </a:r>
             <a:r>
               <a:rPr i="1"/>
-              <a:t> And the best model was chosen on the same predictions it is scored on, so its numbers are slightly optimistic.</a:t>
+              <a:t> And I picked the best model using the same results I report, so its numbers are a little optimistic.</a:t>
             </a:r>
             <a:r>
               <a:rPr i="1"/>
-              <a:t> As next steps, I would add a small symbol resolver to support more refactorings, and ask independent reviewers to judge the rewrites.</a:t>
+              <a:t> Next, I want to run the projects' tests after each change, and ask other developers to judge the changes.</a:t>
             </a:r>
             <a:r>
               <a:rPr i="0"/>
-              <a:t> To summarize: learned boundaries beat fixed thresholds.</a:t>
+              <a:t> So, the three answers.</a:t>
             </a:r>
             <a:r>
               <a:rPr i="0"/>
-              <a:t> Safe automatic refactoring is possible, but narrow, and it should be reviewed by a developer.</a:t>
+              <a:t> One: the published rules are precise, but they miss most smells.</a:t>
             </a:r>
             <a:r>
               <a:rPr i="0"/>
-              <a:t> The tool is open source, and every number in this talk can be regenerated with a script.</a:t>
+              <a:t> Two: machine learning on the same numbers does better.</a:t>
             </a:r>
             <a:r>
               <a:rPr i="0"/>
-              <a:t> Thank you.</a:t>
+              <a:t> Three: automatic fixing is possible and safe, but only for a small part of the code.</a:t>
             </a:r>
             <a:r>
               <a:rPr i="0"/>
-              <a:t> I am happy to take your questions.</a:t>
+              <a:t> Everything is open source, and every number here can be recreated with a script.</a:t>
+            </a:r>
+            <a:r>
+              <a:rPr i="0"/>
+              <a:t> Thank you. I am happy to answer your questions.</a:t>
             </a:r>
           </a:p>
         </p:txBody>
@@ -1627,47 +1631,39 @@
             </a:r>
             <a:r>
               <a:rPr i="0"/>
-              <a:t> The program works, but every change takes longer than it should.</a:t>
+              <a:t> The program works, but every small change takes too long.</a:t>
             </a:r>
             <a:r>
               <a:rPr i="0"/>
-              <a:t> These design problems are called code smells.</a:t>
+              <a:t> We call these design problems code smells.</a:t>
             </a:r>
             <a:r>
               <a:rPr i="0"/>
-              <a:t> They are not bugs, but they make maintenance expensive.</a:t>
+              <a:t> They are not bugs. They make the code expensive to change.</a:t>
             </a:r>
             <a:r>
               <a:rPr i="0"/>
-              <a:t> Most tools find them with fixed thresholds.</a:t>
+              <a:t> Most tools use fixed numbers: if a method has more than 30 lines, it is a Long Method.</a:t>
             </a:r>
             <a:r>
               <a:rPr i="0"/>
-              <a:t> For example, if a method is longer than a certain number of lines, it is a Long Method.</a:t>
+              <a:t> But these numbers come from other projects, and the tools do not fix anything.</a:t>
             </a:r>
             <a:r>
               <a:rPr i="0"/>
-              <a:t> But these numbers were calibrated on other code, and most tools only point at the problem.</a:t>
+              <a:t> So I asked three questions.</a:t>
             </a:r>
             <a:r>
               <a:rPr i="0"/>
-              <a:t> They do not fix it.</a:t>
+              <a:t> One: how accurate are the published rules?</a:t>
             </a:r>
             <a:r>
               <a:rPr i="0"/>
-              <a:t> So we asked three questions.</a:t>
+              <a:t> Two: can machine learning do better?</a:t>
             </a:r>
             <a:r>
               <a:rPr i="0"/>
-              <a:t> First, how accurate are the published detection rules?</a:t>
-            </a:r>
-            <a:r>
-              <a:rPr i="0"/>
-              <a:t> Second, can machine learning do better with the same metrics?</a:t>
-            </a:r>
-            <a:r>
-              <a:rPr i="0"/>
-              <a:t> And third, can we fix smells automatically without breaking the code?</a:t>
+              <a:t> Three: can a tool fix these smells automatically, without breaking the code?</a:t>
             </a:r>
           </a:p>
         </p:txBody>
@@ -1738,19 +1734,27 @@
           <a:p>
             <a:r>
               <a:rPr i="0"/>
-              <a:t>This study looks at four of them.</a:t>
+              <a:t>In this study I look at four smells.</a:t>
             </a:r>
             <a:r>
               <a:rPr i="0"/>
-              <a:t> Blob is a class that does too much.</a:t>
+              <a:t> A Blob is a class that does too much.</a:t>
             </a:r>
             <a:r>
               <a:rPr i="0"/>
-              <a:t> Data Class only holds data and has almost no behavior.</a:t>
+              <a:t> A Data Class only holds data and does almost nothing with it.</a:t>
             </a:r>
             <a:r>
               <a:rPr i="0"/>
-              <a:t> Long Method is a method that has grown too long, and Feature Envy is a method that uses another class more than its own.</a:t>
+              <a:t> A Long Method is a method that has grown too long.</a:t>
+            </a:r>
+            <a:r>
+              <a:rPr i="0"/>
+              <a:t> And Feature Envy is a method that works more with another class than with its own.</a:t>
+            </a:r>
+            <a:r>
+              <a:rPr i="1"/>
+              <a:t> In the drawings, a box is a class, a blue line is a method, and a gray dot is a piece of data.</a:t>
             </a:r>
           </a:p>
         </p:txBody>
@@ -1821,43 +1825,35 @@
           <a:p>
             <a:r>
               <a:rPr i="0"/>
-              <a:t>To answer these questions, I built a tool called JavaSmell.</a:t>
+              <a:t>To answer the three questions, I built a tool called JavaSmell.</a:t>
             </a:r>
             <a:r>
               <a:rPr i="0"/>
-              <a:t> It reads Java code and measures 26 metrics for every class and method.</a:t>
+              <a:t> It reads Java code and measures 26 numbers for every class and method, like the number of lines or how complex the code is.</a:t>
             </a:r>
             <a:r>
               <a:rPr i="0"/>
-              <a:t> On top of these metrics there are three approaches.</a:t>
+              <a:t> Part A uses 8 rules from well-known books and papers.</a:t>
             </a:r>
             <a:r>
               <a:rPr i="0"/>
-              <a:t> A uses 8 detection strategies from the literature, such as Lanza and Marinescu and Fowler.</a:t>
+              <a:t> Part B uses machine learning on the same numbers.</a:t>
             </a:r>
             <a:r>
               <a:rPr i="0"/>
-              <a:t> B trains machine learning classifiers on the same metrics.</a:t>
+              <a:t> Part C fixes the code, but only when it can prove that the change is safe.</a:t>
             </a:r>
             <a:r>
               <a:rPr i="0"/>
-              <a:t> And C is a refactoring engine.</a:t>
+              <a:t> Then the Java compiler checks the result.</a:t>
+            </a:r>
+            <a:r>
+              <a:rPr i="1"/>
+              <a:t> Every finding also says why, for example: this method has 53 lines, and the limit is 30.</a:t>
             </a:r>
             <a:r>
               <a:rPr i="0"/>
-              <a:t> It rewrites code only when it can prove its preconditions from the syntax tree, and then it checks the result with the Java compiler.</a:t>
-            </a:r>
-            <a:r>
-              <a:rPr i="1"/>
-              <a:t> Every detection also shows the conditions it checked, so a developer can see why a class was flagged, not only that it was.</a:t>
-            </a:r>
-            <a:r>
-              <a:rPr i="0"/>
-              <a:t> On the right you can see the web interface.</a:t>
-            </a:r>
-            <a:r>
-              <a:rPr i="0"/>
-              <a:t> It also has a plain-language mode for people without a technical background.</a:t>
+              <a:t> On the right you see the web interface, in plain Albanian, for people who are not experts.</a:t>
             </a:r>
           </a:p>
         </p:txBody>
@@ -1928,31 +1924,31 @@
           <a:p>
             <a:r>
               <a:rPr i="0"/>
-              <a:t>For a fair test, we need labels from people.</a:t>
+              <a:t>To test the tool fairly, I need answers from real people.</a:t>
             </a:r>
             <a:r>
               <a:rPr i="0"/>
-              <a:t> We used MLCQ, a public dataset where professional developers reviewed real open-source Java code.</a:t>
+              <a:t> I used MLCQ, a public dataset where professional developers judged real Java code.</a:t>
             </a:r>
             <a:r>
               <a:rPr i="0"/>
-              <a:t> After matching the samples to our tool, we have 9,046 labeled samples from 512 repositories, for four smells.</a:t>
+              <a:t> In total I have 9,046 pieces of code from 512 open-source projects.</a:t>
             </a:r>
             <a:r>
               <a:rPr i="0"/>
-              <a:t> One important detail is how we split the data.</a:t>
+              <a:t> A model is never tested on a project it has already seen: it learns from four groups of projects and is tested on the fifth.</a:t>
+            </a:r>
+            <a:r>
+              <a:rPr i="1"/>
+              <a:t> Code from the same project looks very similar, so testing on a project it has seen would be like an exam where you already know the answers.</a:t>
             </a:r>
             <a:r>
               <a:rPr i="0"/>
-              <a:t> Code from the same project looks very similar, so we grouped the data by repository: a model is never tested on a project it learned from.</a:t>
+              <a:t> To score the results I use MCC, not simple accuracy.</a:t>
             </a:r>
             <a:r>
               <a:rPr i="0"/>
-              <a:t> And we report the Matthews correlation coefficient, MCC.</a:t>
-            </a:r>
-            <a:r>
-              <a:rPr i="0"/>
-              <a:t> Most samples are clean, so simple accuracy would look very good even for a detector that never fires.</a:t>
+              <a:t> On Feature Envy, a detector that always says “clean” is 93 percent accurate, but it is useless. Its MCC is zero.</a:t>
             </a:r>
           </a:p>
         </p:txBody>
@@ -2027,39 +2023,35 @@
             </a:r>
             <a:r>
               <a:rPr i="0"/>
-              <a:t> The gray bars are the published rules, and the blue bars are the best machine learning model for each smell.</a:t>
+              <a:t> Gray is the published rules, blue is machine learning.</a:t>
             </a:r>
             <a:r>
               <a:rPr i="0"/>
-              <a:t> The rules are often correct when they fire, but they catch only 17 to 47 percent of the smells that developers marked.</a:t>
+              <a:t> Higher is better: zero means guessing, one means perfect.</a:t>
             </a:r>
             <a:r>
               <a:rPr i="0"/>
-              <a:t> The models are better on all four smells, with MCC from 0.32 to 0.72.</a:t>
+              <a:t> The rules are usually right when they raise an alarm, but out of every 100 real smells, they find only 17 to 47.</a:t>
             </a:r>
             <a:r>
               <a:rPr i="0"/>
-              <a:t> Out of every 100 smells, they find 30 to 83; the price is usually more false alarms.</a:t>
+              <a:t> Machine learning is better on all four smells. It finds 30 to 83 out of 100, but usually with more false alarms.</a:t>
             </a:r>
             <a:r>
               <a:rPr i="0"/>
-              <a:t> We also computed 95 percent confidence intervals by resampling repositories.</a:t>
+              <a:t> For Blob, Data Class and Long Method, the improvement is real, not luck.</a:t>
             </a:r>
             <a:r>
               <a:rPr i="0"/>
-              <a:t> The improvement is clearly above zero for Blob, Data Class and Long Method.</a:t>
-            </a:r>
-            <a:r>
-              <a:rPr i="0"/>
-              <a:t> For Feature Envy, the difference could be chance.</a:t>
+              <a:t> For Feature Envy, it could be luck.</a:t>
             </a:r>
             <a:r>
               <a:rPr i="1"/>
-              <a:t> We also compared with PMD, a popular open-source analyzer, on the same samples.</a:t>
+              <a:t> I checked this by repeating the calculation 2,000 times on random samples of the projects.</a:t>
             </a:r>
             <a:r>
               <a:rPr i="1"/>
-              <a:t> Once the confidence interval is considered, PMD is never ahead, and for Long Method our rules are clearly better.</a:t>
+              <a:t> I also compared with PMD, a popular free tool: it was never better than my rules.</a:t>
             </a:r>
           </a:p>
         </p:txBody>
@@ -2134,23 +2126,19 @@
             </a:r>
             <a:r>
               <a:rPr i="0"/>
-              <a:t> We measured how much the human reviewers agree with each other.</a:t>
+              <a:t> I looked at code that two developers judged, and checked how often they agree.</a:t>
             </a:r>
             <a:r>
               <a:rPr i="0"/>
-              <a:t> For Blob, Data Class and Long Method, two reviewers agree only moderately.</a:t>
+              <a:t> For Blob, Data Class and Long Method, they agree only partly.</a:t>
             </a:r>
             <a:r>
               <a:rPr i="0"/>
-              <a:t> For Feature Envy, they agree no better than chance.</a:t>
+              <a:t> For Feature Envy, they agree no more than a coin flip.</a:t>
             </a:r>
             <a:r>
               <a:rPr i="1"/>
-              <a:t> For Feature Envy, their MCC is -0.07, practically zero.</a:t>
-            </a:r>
-            <a:r>
-              <a:rPr i="1"/>
-              <a:t> This matches the previous slide: Feature Envy is where the model could not clearly beat the rules.</a:t>
+              <a:t> Their score is -0.07, practically zero.</a:t>
             </a:r>
             <a:r>
               <a:rPr i="0"/>
@@ -2158,15 +2146,11 @@
             </a:r>
             <a:r>
               <a:rPr i="0"/>
-              <a:t> It is the definition of the smell itself.</a:t>
+              <a:t> If experts do not agree on what a smell is, no tool can learn it well.</a:t>
             </a:r>
             <a:r>
               <a:rPr i="0"/>
-              <a:t> If experts do not agree on what a smell is, no detector can learn it well.</a:t>
-            </a:r>
-            <a:r>
-              <a:rPr i="0"/>
-              <a:t> For me, this is the main lesson of the detection part.</a:t>
+              <a:t> For me, this is the most important lesson of the first part.</a:t>
             </a:r>
           </a:p>
         </p:txBody>
@@ -2237,47 +2221,51 @@
           <a:p>
             <a:r>
               <a:rPr i="0"/>
-              <a:t>Now the refactoring engine.</a:t>
+              <a:t>Now the third question: can we fix smells automatically?</a:t>
             </a:r>
             <a:r>
               <a:rPr i="0"/>
-              <a:t> It supports three transformations: Extract Method, Replace Nested Conditional with Guard Clauses, and Introduce Parameter Object.</a:t>
+              <a:t> The tool knows three fixes: split a long method, turn a big if into an early exit, and group many parameters into one object.</a:t>
             </a:r>
             <a:r>
               <a:rPr i="0"/>
-              <a:t> On the whole corpus it found 15,800 sites and rewrote 3,532 of them, which is 22 percent.</a:t>
+              <a:t> In all the projects, it found 15,800 places where a fix could apply.</a:t>
             </a:r>
             <a:r>
               <a:rPr i="0"/>
-              <a:t> The rest were refused, each with a reason.</a:t>
+              <a:t> It changed 3,532 of them, about 22 percent.</a:t>
+            </a:r>
+            <a:r>
+              <a:rPr i="0"/>
+              <a:t> It refused the rest, because it could not prove the change was safe, and it always says why.</a:t>
+            </a:r>
+            <a:r>
+              <a:rPr i="0"/>
+              <a:t> For me, a refusal is a good result, not a failure.</a:t>
             </a:r>
             <a:r>
               <a:rPr i="1"/>
-              <a:t> In 45 percent of the sites, the reason is simply that the code does not have the shape the transformation needs.</a:t>
+              <a:t> In 45 percent of the places, the code simply does not have the right shape for the fix.</a:t>
             </a:r>
             <a:r>
               <a:rPr i="0"/>
-              <a:t> For us, refusing is a correct result, not a failure.</a:t>
+              <a:t> After a change, the smell disappeared in 65 percent of the cases.</a:t>
             </a:r>
             <a:r>
               <a:rPr i="0"/>
-              <a:t> After rewriting, the smell disappeared in 65 percent of the cases.</a:t>
+              <a:t> Only 1.6 percent of the changes added a new compile error, and those are never written to the code.</a:t>
             </a:r>
             <a:r>
               <a:rPr i="0"/>
-              <a:t> Only 1.6 percent of the rewrites introduced a new type of compilation error, and those never reach the code, because the tool only writes verified rewrites.</a:t>
-            </a:r>
-            <a:r>
-              <a:rPr i="0"/>
-              <a:t> I also read 60 rewrites by hand: after reweighting, about 63 percent would be acceptable to a developer.</a:t>
+              <a:t> By checking 60 changes by hand, I estimate that about 63 percent would be acceptable to a developer.</a:t>
             </a:r>
             <a:r>
               <a:rPr i="1"/>
-              <a:t> Refactoring can also create new smells: 865 appeared after rewriting, most often Long Parameter List, because Extract Method passes every input as a parameter.</a:t>
+              <a:t> Fixes can also create new smells: 865 appeared, most often Long Parameter List.</a:t>
             </a:r>
             <a:r>
               <a:rPr i="1"/>
-              <a:t> In that review, Guard Clauses were always acceptable, and Introduce Parameter Object never, because it only moves the long list into a new class.</a:t>
+              <a:t> Guard Clauses were always acceptable; Introduce Parameter Object never, because it only moves the long list.</a:t>
             </a:r>
           </a:p>
         </p:txBody>
@@ -2348,27 +2336,27 @@
           <a:p>
             <a:r>
               <a:rPr i="0"/>
-              <a:t>Here is one real example from Apache Geode.</a:t>
+              <a:t>Here is one real example, from the Apache Geode project.</a:t>
             </a:r>
             <a:r>
               <a:rPr i="0"/>
-              <a:t> Before, the whole method is wrapped in one if statement, so everything is nested deeply.</a:t>
+              <a:t> Before: the whole method is inside one big if, so all the code is pushed to the right.</a:t>
             </a:r>
             <a:r>
               <a:rPr i="0"/>
-              <a:t> After the rewrite, the condition becomes a guard clause with an early return, and the rest of the method moves one level up.</a:t>
+              <a:t> After: the condition becomes an early return, and the rest of the code moves one level up.</a:t>
             </a:r>
             <a:r>
               <a:rPr i="1"/>
-              <a:t> The engine accepts only exactly this shape: a void method whose whole body is one if statement, without else.</a:t>
+              <a:t> The tool only does this when the method returns nothing and its whole body is one if, without else.</a:t>
             </a:r>
             <a:r>
               <a:rPr i="1"/>
-              <a:t> It also wraps the condition in a not, instead of inverting it by hand, so it stays correct for every condition.</a:t>
+              <a:t> It writes the condition as “not” the original, so the meaning stays exactly the same.</a:t>
             </a:r>
             <a:r>
               <a:rPr i="0"/>
-              <a:t> The rewrite passed the compiler check, and in my review it was acceptable as it is.</a:t>
+              <a:t> The result compiles, and in my review it was acceptable without any change.</a:t>
             </a:r>
           </a:p>
         </p:txBody>

--- a/docs/konferenca/UBT2026_Florent_Latifi_9min.pptx
+++ b/docs/konferenca/UBT2026_Florent_Latifi_9min.pptx
@@ -958,7 +958,7 @@
             </a:r>
             <a:r>
               <a:rPr i="0"/>
-              <a:t> In the next minutes I will show three things: how a tool can find design problems in Java code, how accurate it is, and whether it can also fix them.</a:t>
+              <a:t> Today I want to show you three things: how a tool can find design problems in Java code, how accurate it is, and whether it can also fix them.</a:t>
             </a:r>
           </a:p>
         </p:txBody>
@@ -1029,27 +1029,27 @@
           <a:p>
             <a:r>
               <a:rPr i="0"/>
-              <a:t>How do I know a rewrite is correct? I check it in steps.</a:t>
+              <a:t>But a rewrite is only useful if it is correct. So how do I check that? Step by step.</a:t>
             </a:r>
             <a:r>
               <a:rPr i="0"/>
-              <a:t> Before the change, the tool must prove its conditions on the syntax tree, or it refuses.</a:t>
+              <a:t> First, before the change, the tool must prove its conditions on the syntax tree. If it cannot, it refuses.</a:t>
             </a:r>
             <a:r>
               <a:rPr i="0"/>
-              <a:t> After the change, the compiler checks the file: 98 percent pass, and the 58 that fail are never written.</a:t>
+              <a:t> Second, after the change, the compiler checks the file. 98 percent pass, and the 58 that fail are never written.</a:t>
             </a:r>
             <a:r>
               <a:rPr i="0"/>
-              <a:t> Then the smell is measured again: it is gone after 65 percent of the rewrites.</a:t>
+              <a:t> Third, the smell is measured again. It is gone after 65 percent of the rewrites.</a:t>
             </a:r>
             <a:r>
               <a:rPr i="1"/>
-              <a:t> On a sample of 201 rewrites, I also compiled the whole project: 66 compiled fully, and 2 had an error that the single file had hidden.</a:t>
+              <a:t> I also took a sample of 201 rewrites and compiled the whole project: 66 compiled fully, and 2 had an error that the single file had hidden.</a:t>
             </a:r>
             <a:r>
               <a:rPr i="0"/>
-              <a:t> Finally, I read 60 rewrites by hand: about 63 percent were acceptable, and one changed the behavior.</a:t>
+              <a:t> Finally, I read 60 rewrites by hand. About 63 percent were acceptable, and one changed the behavior.</a:t>
             </a:r>
             <a:r>
               <a:rPr i="0"/>
@@ -1124,7 +1124,7 @@
           <a:p>
             <a:r>
               <a:rPr i="0"/>
-              <a:t>Here is one real example, from the Apache Geode project.</a:t>
+              <a:t>Let me show you what one of these rewrites looks like. This is real code, from the Apache Geode project.</a:t>
             </a:r>
             <a:r>
               <a:rPr i="0"/>
@@ -1136,7 +1136,7 @@
             </a:r>
             <a:r>
               <a:rPr i="1"/>
-              <a:t> The tool only does this when the method returns nothing and its whole body is one if, without else.</a:t>
+              <a:t> The tool only does this when the method returns nothing, and its whole body is one if, without else.</a:t>
             </a:r>
             <a:r>
               <a:rPr i="0"/>
@@ -1211,7 +1211,7 @@
           <a:p>
             <a:r>
               <a:rPr i="0"/>
-              <a:t>So, the three answers.</a:t>
+              <a:t>Let me bring it all together. My three questions have three answers.</a:t>
             </a:r>
             <a:r>
               <a:rPr i="0"/>
@@ -1227,11 +1227,11 @@
             </a:r>
             <a:r>
               <a:rPr i="0"/>
-              <a:t> In practice, published thresholds are a starting point, not a final answer, and an automatic fix is a proposal that a developer reviews.</a:t>
+              <a:t> Why does this matter in practice? Published thresholds are a starting point, not a final answer. And an automatic fix is a proposal that a developer still reviews.</a:t>
             </a:r>
             <a:r>
               <a:rPr i="0"/>
-              <a:t> Next, I want to run the projects' own tests, support more fixes, and ask other developers to judge the changes.</a:t>
+              <a:t> And what comes next? I want to run the projects' own tests, support more fixes, and ask other developers to judge the changes.</a:t>
             </a:r>
             <a:r>
               <a:rPr i="1"/>
@@ -1800,7 +1800,11 @@
           <a:p>
             <a:r>
               <a:rPr i="0"/>
-              <a:t>Every developer knows the class that nobody wants to touch.</a:t>
+              <a:t>Let me start with a problem that every developer knows.</a:t>
+            </a:r>
+            <a:r>
+              <a:rPr i="0"/>
+              <a:t> There is always one class that nobody wants to touch.</a:t>
             </a:r>
             <a:r>
               <a:rPr i="0"/>
@@ -1812,15 +1816,15 @@
             </a:r>
             <a:r>
               <a:rPr i="0"/>
-              <a:t> They are not bugs. They make the code expensive to change.</a:t>
+              <a:t> They are not bugs. They just make the code expensive to change.</a:t>
             </a:r>
             <a:r>
               <a:rPr i="0"/>
-              <a:t> Most tools use fixed numbers: if a method has more than 30 lines, it is a Long Method.</a:t>
+              <a:t> Most tools find them with fixed numbers. For example: if a method has more than 30 lines, it is a Long Method.</a:t>
             </a:r>
             <a:r>
               <a:rPr i="0"/>
-              <a:t> But these numbers come from other projects, and the tools do not fix anything.</a:t>
+              <a:t> But these numbers come from other projects, and the tools only point at the problem. They do not fix it.</a:t>
             </a:r>
             <a:r>
               <a:rPr i="0"/>
@@ -1977,19 +1981,19 @@
           <a:p>
             <a:r>
               <a:rPr i="0"/>
-              <a:t>What is new, compared with earlier studies? Three things.</a:t>
+              <a:t>Other researchers have worked on these questions before. So what is new in my work? Three things.</a:t>
             </a:r>
             <a:r>
               <a:rPr i="0"/>
-              <a:t> First, I measure the published rules against professional developers, instead of taking them as correct.</a:t>
+              <a:t> First, earlier studies take the published rules as correct. I measure them against professional developers.</a:t>
             </a:r>
             <a:r>
               <a:rPr i="0"/>
-              <a:t> Second, rules and machine learning are compared on the same samples, with the same score and a split by project.</a:t>
+              <a:t> Second, I compare rules and machine learning in a fair way: on the same samples, with the same score, and with a split by project.</a:t>
             </a:r>
             <a:r>
               <a:rPr i="0"/>
-              <a:t> Third, one tool finds a smell, fixes it, checks it with the compiler, and measures it again.</a:t>
+              <a:t> Third, earlier tools only suggest a fix. Mine finds a smell, fixes it, checks it with the compiler, and measures it again.</a:t>
             </a:r>
           </a:p>
         </p:txBody>
@@ -2060,7 +2064,7 @@
           <a:p>
             <a:r>
               <a:rPr i="0"/>
-              <a:t>In this study I look at four smells.</a:t>
+              <a:t>Before the results, let me show you the four smells I studied.</a:t>
             </a:r>
             <a:r>
               <a:rPr i="0"/>
@@ -2068,7 +2072,7 @@
             </a:r>
             <a:r>
               <a:rPr i="0"/>
-              <a:t> A Data Class only holds data and does almost nothing with it.</a:t>
+              <a:t> A Data Class only holds data, and does almost nothing with it.</a:t>
             </a:r>
             <a:r>
               <a:rPr i="0"/>
@@ -2147,11 +2151,15 @@
           <a:p>
             <a:r>
               <a:rPr i="0"/>
-              <a:t>To answer the three questions, I built a tool called JavaSmell.</a:t>
+              <a:t>To find these smells, and to fix them, I built a tool called JavaSmell.</a:t>
             </a:r>
             <a:r>
               <a:rPr i="0"/>
-              <a:t> It reads Java code and measures 26 numbers for every class and method, like the number of lines or how complex the code is.</a:t>
+              <a:t> First, it reads the Java code and measures 26 numbers for every class and method, like the number of lines, or how complex the code is.</a:t>
+            </a:r>
+            <a:r>
+              <a:rPr i="0"/>
+              <a:t> Then it uses these numbers in three ways.</a:t>
             </a:r>
             <a:r>
               <a:rPr i="0"/>
@@ -2163,15 +2171,15 @@
             </a:r>
             <a:r>
               <a:rPr i="0"/>
-              <a:t> Part C fixes the code, but only when it can prove that the change is safe.</a:t>
+              <a:t> And Part C fixes the code, but only when it can prove that the change is safe.</a:t>
             </a:r>
             <a:r>
               <a:rPr i="1"/>
-              <a:t> Every finding also says why, for example: this method has 53 lines, and the limit is 30.</a:t>
+              <a:t> Every finding also says why. For example: this method has 53 lines, and the limit is 30.</a:t>
             </a:r>
             <a:r>
               <a:rPr i="0"/>
-              <a:t> On the right you see the web interface, in plain Albanian, for people who are not experts.</a:t>
+              <a:t> On the right you see the web interface. It explains everything in plain Albanian, so you do not need to be an expert.</a:t>
             </a:r>
           </a:p>
         </p:txBody>
@@ -2242,27 +2250,27 @@
           <a:p>
             <a:r>
               <a:rPr i="0"/>
-              <a:t>To test the tool fairly, I need answers from real people.</a:t>
+              <a:t>But a tool is only useful if its answers are right. To check that, I need answers from real people.</a:t>
             </a:r>
             <a:r>
               <a:rPr i="0"/>
-              <a:t> I used MLCQ, a public dataset where professional developers judged real Java code.</a:t>
+              <a:t> So I used MLCQ, a public dataset where professional developers judged real Java code.</a:t>
             </a:r>
             <a:r>
               <a:rPr i="0"/>
-              <a:t> In total I have 9,046 pieces of code from 512 open-source projects.</a:t>
+              <a:t> In total, I have 9,046 pieces of code from 512 open-source projects.</a:t>
             </a:r>
             <a:r>
               <a:rPr i="0"/>
-              <a:t> A model is never tested on a project it has already seen: it learns from four groups of projects and is tested on the fifth.</a:t>
+              <a:t> And the test is fair: a model is never tested on a project it has already seen. It learns from four groups of projects, and it is tested on the fifth.</a:t>
             </a:r>
             <a:r>
               <a:rPr i="1"/>
-              <a:t> Code from the same project looks very similar, so testing on a project it has seen would be like an exam where you already know the answers.</a:t>
+              <a:t> This matters, because code from the same project looks very similar. Testing on a project it has seen would be like an exam where you already know the answers.</a:t>
             </a:r>
             <a:r>
               <a:rPr i="0"/>
-              <a:t> To score the results I use MCC, not simple accuracy.</a:t>
+              <a:t> To score the results, I use MCC, not simple accuracy. Here is why.</a:t>
             </a:r>
             <a:r>
               <a:rPr i="0"/>
@@ -2337,7 +2345,7 @@
           <a:p>
             <a:r>
               <a:rPr i="0"/>
-              <a:t>Here are the main results.</a:t>
+              <a:t>So, how good are the rules, and can machine learning do better? Here are the main results.</a:t>
             </a:r>
             <a:r>
               <a:rPr i="0"/>
@@ -2345,11 +2353,11 @@
             </a:r>
             <a:r>
               <a:rPr i="0"/>
-              <a:t> Higher is better: zero means guessing, one means perfect.</a:t>
+              <a:t> Higher is better: zero means guessing, and one means perfect.</a:t>
             </a:r>
             <a:r>
               <a:rPr i="0"/>
-              <a:t> The rules are usually right when they raise an alarm, but out of every 100 real smells, they find only 17 to 47.</a:t>
+              <a:t> The rules are usually right when they raise an alarm. But out of every 100 real smells, they find only 17 to 47.</a:t>
             </a:r>
             <a:r>
               <a:rPr i="0"/>
@@ -2440,11 +2448,11 @@
           <a:p>
             <a:r>
               <a:rPr i="0"/>
-              <a:t>Why is Feature Envy so hard?</a:t>
+              <a:t>You may ask: why is Feature Envy so hard, even for machine learning?</a:t>
             </a:r>
             <a:r>
               <a:rPr i="0"/>
-              <a:t> I looked at code that two developers judged, and checked how often they agree.</a:t>
+              <a:t> To find out, I looked at code that two developers judged, and checked how often they agree.</a:t>
             </a:r>
             <a:r>
               <a:rPr i="0"/>
@@ -2535,11 +2543,11 @@
           <a:p>
             <a:r>
               <a:rPr i="0"/>
-              <a:t>Now the third question: can we fix smells automatically?</a:t>
+              <a:t>So much for finding smells. Now the third question: once we find a smell, can the tool fix it?</a:t>
             </a:r>
             <a:r>
               <a:rPr i="0"/>
-              <a:t> The tool knows three fixes: split a long method, turn a big if into an early exit, and group many parameters into one object.</a:t>
+              <a:t> The tool knows three fixes: it can split a long method, turn a big if into an early exit, or group many parameters into one object.</a:t>
             </a:r>
             <a:r>
               <a:rPr i="0"/>
@@ -2551,15 +2559,15 @@
             </a:r>
             <a:r>
               <a:rPr i="0"/>
-              <a:t> It refused 12,252, because it could not prove the change was safe, and it always says why.</a:t>
+              <a:t> It refused 12,252, because it could not prove that the change was safe. And it always says why.</a:t>
             </a:r>
             <a:r>
               <a:rPr i="0"/>
-              <a:t> The other 16 could not be found again in the file.</a:t>
+              <a:t> The last 16 could not be found again in the file. Together, that makes 15,800.</a:t>
             </a:r>
             <a:r>
               <a:rPr i="0"/>
-              <a:t> For me, a refusal is a good result, not a failure.</a:t>
+              <a:t> For me, a refusal is a good result, not a failure. It is better to refuse than to break someone's code.</a:t>
             </a:r>
             <a:r>
               <a:rPr i="1"/>
@@ -9942,25 +9950,6 @@
                 <a:latin typeface="Segoe UI Semibold"/>
               </a:rPr>
               <a:t>References</a:t>
-            </a:r>
-          </a:p>
-          <a:p>
-            <a:pPr algn="l">
-              <a:spcBef>
-                <a:spcPts val="600"/>
-              </a:spcBef>
-              <a:spcAft>
-                <a:spcPts val="0"/>
-              </a:spcAft>
-            </a:pPr>
-            <a:r>
-              <a:rPr sz="1600">
-                <a:solidFill>
-                  <a:srgbClr val="4C5560"/>
-                </a:solidFill>
-                <a:latin typeface="Segoe UI"/>
-              </a:rPr>
-              <a:t>Cited on these slides, in IEEE style; the thesis lists all 45 sources</a:t>
             </a:r>
           </a:p>
         </p:txBody>
